--- a/docs/ClinicWorks-What-Is-Left.pptx
+++ b/docs/ClinicWorks-What-Is-Left.pptx
@@ -4551,7 +4551,7 @@
                 <a:ea typeface="Tahoma" pitchFamily="34" charset="-122"/>
                 <a:cs typeface="Tahoma" pitchFamily="34" charset="-120"/>
               </a:rPr>
-              <a:t>dankbkk-site-4jrn</a:t>
+              <a:t>dankbkk-site-4jrn · ตรวจแล้ว ลบได้เลย</a:t>
             </a:r>
             <a:endParaRPr lang="en-US" sz="950" dirty="0"/>
           </a:p>
@@ -4593,7 +4593,7 @@
                 <a:ea typeface="Tahoma" pitchFamily="34" charset="-122"/>
                 <a:cs typeface="Tahoma" pitchFamily="34" charset="-120"/>
               </a:rPr>
-              <a:t>มีโปรเจกต์ชื่อ dankbkk-site-4jrn อยู่อีกตัวหนึ่ง ถ้ายังอยู่ ทุกครั้งที่ตั้ง env จะต้องตั้งสองรอบตลอดไป</a:t>
+              <a:t>เช็คกับ Vercel แล้ว: dankbkk-site ถือ dankbangkok.com และ www.dankbangkok.com — ตัวนี้คือของจริง เก็บไว้ · dankbkk-site-4jrn ไม่มีโดเมนของร้านเลย มีแต่ URL .vercel.app ของตัวเอง และไม่มีโค้ดตรงไหนเรียกใช้ · ทั้งคู่ผูก repo เดียวกัน push ทีนึงจึง build สองรอบ</a:t>
             </a:r>
             <a:endParaRPr lang="en-US" sz="1050" dirty="0"/>
           </a:p>
@@ -4674,7 +4674,7 @@
                 <a:ea typeface="Tahoma" pitchFamily="34" charset="-122"/>
                 <a:cs typeface="Tahoma" pitchFamily="34" charset="-120"/>
               </a:rPr>
-              <a:t>ยืนยันว่าโดเมนจริงชี้ไปที่ dankbkk-site แล้วหรือยัง — ถ้าใช่ ลบตัวซ้ำได้เลย</a:t>
+              <a:t>Vercel → dankbkk-site-4jrn → Settings → เลื่อนลงล่างสุด → Delete Project  (ผมลบให้ไม่ได้ เครื่องมือที่ต่ออยู่อ่านได้อย่างเดียว)</a:t>
             </a:r>
             <a:endParaRPr lang="en-US" sz="1000" dirty="0"/>
           </a:p>
